--- a/1_doublingRate/Figure2_case1.pptx
+++ b/1_doublingRate/Figure2_case1.pptx
@@ -253,7 +253,7 @@
       <p15:sldGuideLst xmlns:p15="http://schemas.microsoft.com/office/powerpoint/2012/main"/>
     </p:ext>
     <p:ext uri="GoogleSlidesCustomDataVersion2">
-      <go:slidesCustomData xmlns:go="http://customooxmlschemas.google.com/" xmlns:ahyp="http://schemas.microsoft.com/office/drawing/2018/hyperlinkcolor" xmlns:p15="http://schemas.microsoft.com/office/powerpoint/2012/main" xmlns:p14="http://schemas.microsoft.com/office/powerpoint/2010/main" xmlns:com="http://schemas.openxmlformats.org/drawingml/2006/compatibility" xmlns:pvml="urn:schemas-microsoft-com:office:powerpoint" xmlns:v="urn:schemas-microsoft-com:vml" xmlns:o="urn:schemas-microsoft-com:office:office" xmlns:dgm="http://schemas.openxmlformats.org/drawingml/2006/diagram" xmlns:c="http://schemas.openxmlformats.org/drawingml/2006/chart" xmlns:mv="urn:schemas-microsoft-com:mac:vml" xmlns:mc="http://schemas.openxmlformats.org/markup-compatibility/2006" xmlns="" r:id="rId8" roundtripDataSignature="AMtx7mgIxyl4bEzcNayDQ1Sc4BGs65vqzg=="/>
+      <go:slidesCustomData xmlns="" xmlns:mc="http://schemas.openxmlformats.org/markup-compatibility/2006" xmlns:mv="urn:schemas-microsoft-com:mac:vml" xmlns:c="http://schemas.openxmlformats.org/drawingml/2006/chart" xmlns:dgm="http://schemas.openxmlformats.org/drawingml/2006/diagram" xmlns:o="urn:schemas-microsoft-com:office:office" xmlns:v="urn:schemas-microsoft-com:vml" xmlns:pvml="urn:schemas-microsoft-com:office:powerpoint" xmlns:com="http://schemas.openxmlformats.org/drawingml/2006/compatibility" xmlns:p14="http://schemas.microsoft.com/office/powerpoint/2010/main" xmlns:p15="http://schemas.microsoft.com/office/powerpoint/2012/main" xmlns:ahyp="http://schemas.microsoft.com/office/drawing/2018/hyperlinkcolor" xmlns:go="http://customooxmlschemas.google.com/" r:id="rId8" roundtripDataSignature="AMtx7mgIxyl4bEzcNayDQ1Sc4BGs65vqzg=="/>
     </p:ext>
   </p:extLst>
 </p:presentation>

--- a/1_doublingRate/Figure2_case1.pptx
+++ b/1_doublingRate/Figure2_case1.pptx
@@ -12155,66 +12155,6 @@
           </a:prstGeom>
         </p:spPr>
       </p:pic>
-      <p:pic>
-        <p:nvPicPr>
-          <p:cNvPr id="9" name="Picture 8">
-            <a:extLst>
-              <a:ext uri="{FF2B5EF4-FFF2-40B4-BE49-F238E27FC236}">
-                <a16:creationId xmlns:a16="http://schemas.microsoft.com/office/drawing/2014/main" id="{3E7890C6-34DD-F0FC-D3B0-F014713F57A7}"/>
-              </a:ext>
-            </a:extLst>
-          </p:cNvPr>
-          <p:cNvPicPr>
-            <a:picLocks noChangeAspect="1"/>
-          </p:cNvPicPr>
-          <p:nvPr/>
-        </p:nvPicPr>
-        <p:blipFill>
-          <a:blip r:embed="rId7"/>
-          <a:stretch>
-            <a:fillRect/>
-          </a:stretch>
-        </p:blipFill>
-        <p:spPr>
-          <a:xfrm>
-            <a:off x="16791724" y="528414"/>
-            <a:ext cx="5795053" cy="4033489"/>
-          </a:xfrm>
-          <a:prstGeom prst="rect">
-            <a:avLst/>
-          </a:prstGeom>
-        </p:spPr>
-      </p:pic>
-      <p:pic>
-        <p:nvPicPr>
-          <p:cNvPr id="7" name="Picture 6">
-            <a:extLst>
-              <a:ext uri="{FF2B5EF4-FFF2-40B4-BE49-F238E27FC236}">
-                <a16:creationId xmlns:a16="http://schemas.microsoft.com/office/drawing/2014/main" id="{6DF54CDE-D16C-D070-E91A-BEE41B247746}"/>
-              </a:ext>
-            </a:extLst>
-          </p:cNvPr>
-          <p:cNvPicPr>
-            <a:picLocks noChangeAspect="1"/>
-          </p:cNvPicPr>
-          <p:nvPr/>
-        </p:nvPicPr>
-        <p:blipFill>
-          <a:blip r:embed="rId8"/>
-          <a:stretch>
-            <a:fillRect/>
-          </a:stretch>
-        </p:blipFill>
-        <p:spPr>
-          <a:xfrm>
-            <a:off x="10679393" y="4973249"/>
-            <a:ext cx="3212199" cy="2017217"/>
-          </a:xfrm>
-          <a:prstGeom prst="rect">
-            <a:avLst/>
-          </a:prstGeom>
-        </p:spPr>
-      </p:pic>
       <p:sp>
         <p:nvSpPr>
           <p:cNvPr id="19" name="Google Shape;99;p1">
@@ -12282,7 +12222,7 @@
           <p:nvPr/>
         </p:nvPicPr>
         <p:blipFill>
-          <a:blip r:embed="rId9"/>
+          <a:blip r:embed="rId7"/>
           <a:stretch>
             <a:fillRect/>
           </a:stretch>
@@ -12291,37 +12231,6 @@
           <a:xfrm>
             <a:off x="5887923" y="5084575"/>
             <a:ext cx="3487483" cy="5508799"/>
-          </a:xfrm>
-          <a:prstGeom prst="rect">
-            <a:avLst/>
-          </a:prstGeom>
-        </p:spPr>
-      </p:pic>
-      <p:pic>
-        <p:nvPicPr>
-          <p:cNvPr id="27" name="Picture 26">
-            <a:extLst>
-              <a:ext uri="{FF2B5EF4-FFF2-40B4-BE49-F238E27FC236}">
-                <a16:creationId xmlns:a16="http://schemas.microsoft.com/office/drawing/2014/main" id="{E7D66B22-1BE9-EAD9-703D-AF136E614AB5}"/>
-              </a:ext>
-            </a:extLst>
-          </p:cNvPr>
-          <p:cNvPicPr>
-            <a:picLocks noChangeAspect="1"/>
-          </p:cNvPicPr>
-          <p:nvPr/>
-        </p:nvPicPr>
-        <p:blipFill>
-          <a:blip r:embed="rId10"/>
-          <a:srcRect l="8571" r="6260" b="17770"/>
-          <a:stretch>
-            <a:fillRect/>
-          </a:stretch>
-        </p:blipFill>
-        <p:spPr>
-          <a:xfrm>
-            <a:off x="10012509" y="7101792"/>
-            <a:ext cx="4672756" cy="3602908"/>
           </a:xfrm>
           <a:prstGeom prst="rect">
             <a:avLst/>
@@ -12343,7 +12252,7 @@
           <p:nvPr/>
         </p:nvPicPr>
         <p:blipFill>
-          <a:blip r:embed="rId11"/>
+          <a:blip r:embed="rId8"/>
           <a:stretch>
             <a:fillRect/>
           </a:stretch>
@@ -12410,6 +12319,97 @@
           </a:p>
         </p:txBody>
       </p:sp>
+      <p:pic>
+        <p:nvPicPr>
+          <p:cNvPr id="3" name="Picture 2">
+            <a:extLst>
+              <a:ext uri="{FF2B5EF4-FFF2-40B4-BE49-F238E27FC236}">
+                <a16:creationId xmlns:a16="http://schemas.microsoft.com/office/drawing/2014/main" id="{81A47AB0-0076-D55A-5ACA-FF469AB5DAAE}"/>
+              </a:ext>
+            </a:extLst>
+          </p:cNvPr>
+          <p:cNvPicPr>
+            <a:picLocks noChangeAspect="1"/>
+          </p:cNvPicPr>
+          <p:nvPr/>
+        </p:nvPicPr>
+        <p:blipFill>
+          <a:blip r:embed="rId9"/>
+          <a:stretch>
+            <a:fillRect/>
+          </a:stretch>
+        </p:blipFill>
+        <p:spPr>
+          <a:xfrm>
+            <a:off x="16603550" y="312348"/>
+            <a:ext cx="6081768" cy="4233049"/>
+          </a:xfrm>
+          <a:prstGeom prst="rect">
+            <a:avLst/>
+          </a:prstGeom>
+        </p:spPr>
+      </p:pic>
+      <p:pic>
+        <p:nvPicPr>
+          <p:cNvPr id="5" name="Picture 4">
+            <a:extLst>
+              <a:ext uri="{FF2B5EF4-FFF2-40B4-BE49-F238E27FC236}">
+                <a16:creationId xmlns:a16="http://schemas.microsoft.com/office/drawing/2014/main" id="{A929F67E-90AC-1C50-C317-E98D54BB47B7}"/>
+              </a:ext>
+            </a:extLst>
+          </p:cNvPr>
+          <p:cNvPicPr>
+            <a:picLocks noChangeAspect="1"/>
+          </p:cNvPicPr>
+          <p:nvPr/>
+        </p:nvPicPr>
+        <p:blipFill>
+          <a:blip r:embed="rId10"/>
+          <a:stretch>
+            <a:fillRect/>
+          </a:stretch>
+        </p:blipFill>
+        <p:spPr>
+          <a:xfrm>
+            <a:off x="10578847" y="4830348"/>
+            <a:ext cx="3565836" cy="2227126"/>
+          </a:xfrm>
+          <a:prstGeom prst="rect">
+            <a:avLst/>
+          </a:prstGeom>
+        </p:spPr>
+      </p:pic>
+      <p:pic>
+        <p:nvPicPr>
+          <p:cNvPr id="11" name="Picture 10">
+            <a:extLst>
+              <a:ext uri="{FF2B5EF4-FFF2-40B4-BE49-F238E27FC236}">
+                <a16:creationId xmlns:a16="http://schemas.microsoft.com/office/drawing/2014/main" id="{C15F1B63-0EBE-6350-B423-EED055010C67}"/>
+              </a:ext>
+            </a:extLst>
+          </p:cNvPr>
+          <p:cNvPicPr>
+            <a:picLocks noChangeAspect="1"/>
+          </p:cNvPicPr>
+          <p:nvPr/>
+        </p:nvPicPr>
+        <p:blipFill>
+          <a:blip r:embed="rId11"/>
+          <a:srcRect b="19547"/>
+          <a:stretch>
+            <a:fillRect/>
+          </a:stretch>
+        </p:blipFill>
+        <p:spPr>
+          <a:xfrm>
+            <a:off x="9600277" y="7201583"/>
+            <a:ext cx="5486400" cy="3525028"/>
+          </a:xfrm>
+          <a:prstGeom prst="rect">
+            <a:avLst/>
+          </a:prstGeom>
+        </p:spPr>
+      </p:pic>
     </p:spTree>
   </p:cSld>
   <p:clrMapOvr>
